--- a/Python/Lesson 06 - Error Handling/Lesson 06 - Error Handling.pptx
+++ b/Python/Lesson 06 - Error Handling/Lesson 06 - Error Handling.pptx
@@ -5,7 +5,7 @@
     <p:sldMasterId id="2147483684" r:id="rId1"/>
   </p:sldMasterIdLst>
   <p:notesMasterIdLst>
-    <p:notesMasterId r:id="rId19"/>
+    <p:notesMasterId r:id="rId18"/>
   </p:notesMasterIdLst>
   <p:sldIdLst>
     <p:sldId id="256" r:id="rId2"/>
@@ -22,26 +22,25 @@
     <p:sldId id="277" r:id="rId13"/>
     <p:sldId id="494" r:id="rId14"/>
     <p:sldId id="278" r:id="rId15"/>
-    <p:sldId id="495" r:id="rId16"/>
-    <p:sldId id="279" r:id="rId17"/>
-    <p:sldId id="280" r:id="rId18"/>
+    <p:sldId id="279" r:id="rId16"/>
+    <p:sldId id="280" r:id="rId17"/>
   </p:sldIdLst>
   <p:sldSz cx="9144000" cy="5143500" type="screen16x9"/>
   <p:notesSz cx="6858000" cy="9144000"/>
   <p:embeddedFontLst>
     <p:embeddedFont>
       <p:font typeface="Consolas" panose="020B0609020204030204" pitchFamily="49" charset="0"/>
-      <p:regular r:id="rId20"/>
-      <p:bold r:id="rId21"/>
-      <p:italic r:id="rId22"/>
-      <p:boldItalic r:id="rId23"/>
+      <p:regular r:id="rId19"/>
+      <p:bold r:id="rId20"/>
+      <p:italic r:id="rId21"/>
+      <p:boldItalic r:id="rId22"/>
     </p:embeddedFont>
     <p:embeddedFont>
       <p:font typeface="Roboto" panose="02000000000000000000" pitchFamily="2" charset="0"/>
-      <p:regular r:id="rId24"/>
-      <p:bold r:id="rId25"/>
-      <p:italic r:id="rId26"/>
-      <p:boldItalic r:id="rId27"/>
+      <p:regular r:id="rId23"/>
+      <p:bold r:id="rId24"/>
+      <p:italic r:id="rId25"/>
+      <p:boldItalic r:id="rId26"/>
     </p:embeddedFont>
   </p:embeddedFontLst>
   <p:defaultTextStyle>
@@ -1631,151 +1630,6 @@
   <p:cSld>
     <p:spTree>
       <p:nvGrpSpPr>
-        <p:cNvPr id="1" name="Shape 508">
-          <a:extLst>
-            <a:ext uri="{FF2B5EF4-FFF2-40B4-BE49-F238E27FC236}">
-              <a16:creationId xmlns:a16="http://schemas.microsoft.com/office/drawing/2014/main" id="{12846643-1079-C6D7-6752-BBE0CD9F7115}"/>
-            </a:ext>
-          </a:extLst>
-        </p:cNvPr>
-        <p:cNvGrpSpPr/>
-        <p:nvPr/>
-      </p:nvGrpSpPr>
-      <p:grpSpPr>
-        <a:xfrm>
-          <a:off x="0" y="0"/>
-          <a:ext cx="0" cy="0"/>
-          <a:chOff x="0" y="0"/>
-          <a:chExt cx="0" cy="0"/>
-        </a:xfrm>
-      </p:grpSpPr>
-      <p:sp>
-        <p:nvSpPr>
-          <p:cNvPr id="509" name="Google Shape;509;p24:notes">
-            <a:extLst>
-              <a:ext uri="{FF2B5EF4-FFF2-40B4-BE49-F238E27FC236}">
-                <a16:creationId xmlns:a16="http://schemas.microsoft.com/office/drawing/2014/main" id="{D6687998-9C0B-95BE-F9C2-3285C2C98603}"/>
-              </a:ext>
-            </a:extLst>
-          </p:cNvPr>
-          <p:cNvSpPr>
-            <a:spLocks noGrp="1" noRot="1" noChangeAspect="1"/>
-          </p:cNvSpPr>
-          <p:nvPr>
-            <p:ph type="sldImg" idx="2"/>
-          </p:nvPr>
-        </p:nvSpPr>
-        <p:spPr>
-          <a:xfrm>
-            <a:off x="381000" y="685800"/>
-            <a:ext cx="6096000" cy="3429000"/>
-          </a:xfrm>
-          <a:custGeom>
-            <a:avLst/>
-            <a:gdLst/>
-            <a:ahLst/>
-            <a:cxnLst/>
-            <a:rect l="l" t="t" r="r" b="b"/>
-            <a:pathLst>
-              <a:path w="120000" h="120000" extrusionOk="0">
-                <a:moveTo>
-                  <a:pt x="0" y="0"/>
-                </a:moveTo>
-                <a:lnTo>
-                  <a:pt x="120000" y="0"/>
-                </a:lnTo>
-                <a:lnTo>
-                  <a:pt x="120000" y="120000"/>
-                </a:lnTo>
-                <a:lnTo>
-                  <a:pt x="0" y="120000"/>
-                </a:lnTo>
-                <a:close/>
-              </a:path>
-            </a:pathLst>
-          </a:custGeom>
-          <a:noFill/>
-          <a:ln w="9525" cap="flat" cmpd="sng">
-            <a:solidFill>
-              <a:srgbClr val="000000"/>
-            </a:solidFill>
-            <a:prstDash val="solid"/>
-            <a:round/>
-            <a:headEnd type="none" w="sm" len="sm"/>
-            <a:tailEnd type="none" w="sm" len="sm"/>
-          </a:ln>
-        </p:spPr>
-      </p:sp>
-      <p:sp>
-        <p:nvSpPr>
-          <p:cNvPr id="510" name="Google Shape;510;p24:notes">
-            <a:extLst>
-              <a:ext uri="{FF2B5EF4-FFF2-40B4-BE49-F238E27FC236}">
-                <a16:creationId xmlns:a16="http://schemas.microsoft.com/office/drawing/2014/main" id="{4417934F-AE4E-78D3-31A3-D55C3A3515FF}"/>
-              </a:ext>
-            </a:extLst>
-          </p:cNvPr>
-          <p:cNvSpPr txBox="1">
-            <a:spLocks noGrp="1"/>
-          </p:cNvSpPr>
-          <p:nvPr>
-            <p:ph type="body" idx="1"/>
-          </p:nvPr>
-        </p:nvSpPr>
-        <p:spPr>
-          <a:xfrm>
-            <a:off x="685800" y="4343400"/>
-            <a:ext cx="5486400" cy="4114800"/>
-          </a:xfrm>
-          <a:prstGeom prst="rect">
-            <a:avLst/>
-          </a:prstGeom>
-          <a:noFill/>
-          <a:ln>
-            <a:noFill/>
-          </a:ln>
-        </p:spPr>
-        <p:txBody>
-          <a:bodyPr spcFirstLastPara="1" wrap="square" lIns="91425" tIns="91425" rIns="91425" bIns="91425" anchor="t" anchorCtr="0">
-            <a:noAutofit/>
-          </a:bodyPr>
-          <a:lstStyle/>
-          <a:p>
-            <a:pPr marL="0" lvl="0" indent="0" algn="l" rtl="0">
-              <a:lnSpc>
-                <a:spcPct val="100000"/>
-              </a:lnSpc>
-              <a:spcBef>
-                <a:spcPts val="0"/>
-              </a:spcBef>
-              <a:spcAft>
-                <a:spcPts val="0"/>
-              </a:spcAft>
-              <a:buSzPts val="1100"/>
-              <a:buNone/>
-            </a:pPr>
-            <a:endParaRPr/>
-          </a:p>
-        </p:txBody>
-      </p:sp>
-    </p:spTree>
-    <p:extLst>
-      <p:ext uri="{BB962C8B-B14F-4D97-AF65-F5344CB8AC3E}">
-        <p14:creationId xmlns:p14="http://schemas.microsoft.com/office/powerpoint/2010/main" val="2733208844"/>
-      </p:ext>
-    </p:extLst>
-  </p:cSld>
-  <p:clrMapOvr>
-    <a:masterClrMapping/>
-  </p:clrMapOvr>
-</p:notes>
-</file>
-
-<file path=ppt/notesSlides/notesSlide16.xml><?xml version="1.0" encoding="utf-8"?>
-<p:notes xmlns:a="http://schemas.openxmlformats.org/drawingml/2006/main" xmlns:r="http://schemas.openxmlformats.org/officeDocument/2006/relationships" xmlns:p="http://schemas.openxmlformats.org/presentationml/2006/main" showMasterSp="0" showMasterPhAnim="0">
-  <p:cSld>
-    <p:spTree>
-      <p:nvGrpSpPr>
         <p:cNvPr id="1" name="Shape 508"/>
         <p:cNvGrpSpPr/>
         <p:nvPr/>
@@ -1893,7 +1747,7 @@
 </p:notes>
 </file>
 
-<file path=ppt/notesSlides/notesSlide17.xml><?xml version="1.0" encoding="utf-8"?>
+<file path=ppt/notesSlides/notesSlide16.xml><?xml version="1.0" encoding="utf-8"?>
 <p:notes xmlns:a="http://schemas.openxmlformats.org/drawingml/2006/main" xmlns:r="http://schemas.openxmlformats.org/officeDocument/2006/relationships" xmlns:p="http://schemas.openxmlformats.org/presentationml/2006/main" showMasterSp="0" showMasterPhAnim="0">
   <p:cSld>
     <p:spTree>
@@ -31805,7 +31659,7 @@
           <a:p>
             <a:fld id="{971AFA9C-17DA-4726-B9E3-ADECF7729AF7}" type="datetimeFigureOut">
               <a:rPr lang="en-US" smtClean="0"/>
-              <a:t>6/22/2026</a:t>
+              <a:t>7/24/2026</a:t>
             </a:fld>
             <a:endParaRPr lang="en-US"/>
           </a:p>
@@ -46294,145 +46148,6 @@
   <p:cSld>
     <p:spTree>
       <p:nvGrpSpPr>
-        <p:cNvPr id="1" name="Shape 511">
-          <a:extLst>
-            <a:ext uri="{FF2B5EF4-FFF2-40B4-BE49-F238E27FC236}">
-              <a16:creationId xmlns:a16="http://schemas.microsoft.com/office/drawing/2014/main" id="{6B2C2EEC-5410-B106-F604-7BC328C4FA19}"/>
-            </a:ext>
-          </a:extLst>
-        </p:cNvPr>
-        <p:cNvGrpSpPr/>
-        <p:nvPr/>
-      </p:nvGrpSpPr>
-      <p:grpSpPr>
-        <a:xfrm>
-          <a:off x="0" y="0"/>
-          <a:ext cx="0" cy="0"/>
-          <a:chOff x="0" y="0"/>
-          <a:chExt cx="0" cy="0"/>
-        </a:xfrm>
-      </p:grpSpPr>
-      <p:sp>
-        <p:nvSpPr>
-          <p:cNvPr id="512" name="Google Shape;512;p62">
-            <a:extLst>
-              <a:ext uri="{FF2B5EF4-FFF2-40B4-BE49-F238E27FC236}">
-                <a16:creationId xmlns:a16="http://schemas.microsoft.com/office/drawing/2014/main" id="{1357D0BB-7E77-0CF9-EAE9-D2FEDE99C148}"/>
-              </a:ext>
-            </a:extLst>
-          </p:cNvPr>
-          <p:cNvSpPr txBox="1">
-            <a:spLocks noGrp="1"/>
-          </p:cNvSpPr>
-          <p:nvPr>
-            <p:ph type="title"/>
-          </p:nvPr>
-        </p:nvSpPr>
-        <p:spPr>
-          <a:xfrm>
-            <a:off x="411480" y="308611"/>
-            <a:ext cx="6173470" cy="891778"/>
-          </a:xfrm>
-          <a:noFill/>
-          <a:ln>
-            <a:noFill/>
-          </a:ln>
-        </p:spPr>
-        <p:txBody>
-          <a:bodyPr spcFirstLastPara="1" wrap="square" lIns="91425" tIns="91425" rIns="91425" bIns="91425" anchor="t" anchorCtr="0">
-            <a:normAutofit/>
-          </a:bodyPr>
-          <a:lstStyle/>
-          <a:p>
-            <a:pPr lvl="0"/>
-            <a:r>
-              <a:rPr lang="en-US" dirty="0"/>
-              <a:t>Exercise 1 (15 min)</a:t>
-            </a:r>
-          </a:p>
-        </p:txBody>
-      </p:sp>
-      <p:sp>
-        <p:nvSpPr>
-          <p:cNvPr id="3" name="Google Shape;513;p62">
-            <a:extLst>
-              <a:ext uri="{FF2B5EF4-FFF2-40B4-BE49-F238E27FC236}">
-                <a16:creationId xmlns:a16="http://schemas.microsoft.com/office/drawing/2014/main" id="{027B582E-4378-7CDA-7512-00D64A51374B}"/>
-              </a:ext>
-            </a:extLst>
-          </p:cNvPr>
-          <p:cNvSpPr txBox="1">
-            <a:spLocks noGrp="1"/>
-          </p:cNvSpPr>
-          <p:nvPr>
-            <p:ph type="body" idx="1"/>
-          </p:nvPr>
-        </p:nvSpPr>
-        <p:spPr>
-          <a:xfrm>
-            <a:off x="411480" y="1611630"/>
-            <a:ext cx="7847857" cy="3017520"/>
-          </a:xfrm>
-          <a:noFill/>
-          <a:ln>
-            <a:noFill/>
-          </a:ln>
-        </p:spPr>
-        <p:txBody>
-          <a:bodyPr spcFirstLastPara="1" wrap="square" lIns="91425" tIns="91425" rIns="91425" bIns="91425" anchor="t" anchorCtr="0">
-            <a:normAutofit/>
-          </a:bodyPr>
-          <a:lstStyle/>
-          <a:p>
-            <a:pPr lvl="0"/>
-            <a:r>
-              <a:rPr lang="en-US" dirty="0">
-                <a:solidFill>
-                  <a:schemeClr val="bg1"/>
-                </a:solidFill>
-              </a:rPr>
-              <a:t>What kind of errors can occur in pre-class Problem 2?</a:t>
-            </a:r>
-          </a:p>
-          <a:p>
-            <a:pPr lvl="0"/>
-            <a:endParaRPr lang="en-US" dirty="0">
-              <a:solidFill>
-                <a:schemeClr val="bg1"/>
-              </a:solidFill>
-            </a:endParaRPr>
-          </a:p>
-          <a:p>
-            <a:pPr lvl="0"/>
-            <a:r>
-              <a:rPr lang="en-US" dirty="0">
-                <a:solidFill>
-                  <a:schemeClr val="bg1"/>
-                </a:solidFill>
-              </a:rPr>
-              <a:t>Add in try-except blocks to catch errors and allow the program to continue gracefully after these errors occur. </a:t>
-            </a:r>
-          </a:p>
-        </p:txBody>
-      </p:sp>
-    </p:spTree>
-    <p:extLst>
-      <p:ext uri="{BB962C8B-B14F-4D97-AF65-F5344CB8AC3E}">
-        <p14:creationId xmlns:p14="http://schemas.microsoft.com/office/powerpoint/2010/main" val="1376424257"/>
-      </p:ext>
-    </p:extLst>
-  </p:cSld>
-  <p:clrMapOvr>
-    <a:masterClrMapping/>
-  </p:clrMapOvr>
-</p:sld>
-</file>
-
-<file path=ppt/slides/slide16.xml><?xml version="1.0" encoding="utf-8"?>
-<p:sld xmlns:a="http://schemas.openxmlformats.org/drawingml/2006/main" xmlns:r="http://schemas.openxmlformats.org/officeDocument/2006/relationships" xmlns:p="http://schemas.openxmlformats.org/presentationml/2006/main">
-  <p:cSld>
-    <p:spTree>
-      <p:nvGrpSpPr>
         <p:cNvPr id="1" name="Shape 511"/>
         <p:cNvGrpSpPr/>
         <p:nvPr/>
@@ -46474,7 +46189,7 @@
             <a:pPr lvl="0"/>
             <a:r>
               <a:rPr lang="en-US" dirty="0"/>
-              <a:t>Exercise 2 (20 min)</a:t>
+              <a:t>Exercise (20 min)</a:t>
             </a:r>
           </a:p>
         </p:txBody>
@@ -46501,7 +46216,7 @@
         </p:spPr>
         <p:txBody>
           <a:bodyPr spcFirstLastPara="1" wrap="square" lIns="91425" tIns="91425" rIns="91425" bIns="91425" anchor="t" anchorCtr="0">
-            <a:normAutofit/>
+            <a:normAutofit fontScale="92500" lnSpcReduction="10000"/>
           </a:bodyPr>
           <a:lstStyle/>
           <a:p>
@@ -46512,8 +46227,35 @@
                   <a:schemeClr val="bg1"/>
                 </a:solidFill>
               </a:rPr>
+              <a:t>Randomly assign a number from 1 to 100.</a:t>
+            </a:r>
+          </a:p>
+          <a:p>
+            <a:pPr lvl="0"/>
+            <a:endParaRPr lang="en-US" dirty="0">
+              <a:solidFill>
+                <a:schemeClr val="bg1"/>
+              </a:solidFill>
+            </a:endParaRPr>
+          </a:p>
+          <a:p>
+            <a:pPr lvl="0"/>
+            <a:r>
+              <a:rPr lang="en-US" dirty="0">
+                <a:solidFill>
+                  <a:schemeClr val="bg1"/>
+                </a:solidFill>
+              </a:rPr>
               <a:t>Write a block of code that takes in user input until they guess the random number</a:t>
             </a:r>
+          </a:p>
+          <a:p>
+            <a:pPr lvl="0"/>
+            <a:endParaRPr lang="en-US" dirty="0">
+              <a:solidFill>
+                <a:schemeClr val="bg1"/>
+              </a:solidFill>
+            </a:endParaRPr>
           </a:p>
           <a:p>
             <a:pPr lvl="0"/>
@@ -46609,7 +46351,7 @@
 </p:sld>
 </file>
 
-<file path=ppt/slides/slide17.xml><?xml version="1.0" encoding="utf-8"?>
+<file path=ppt/slides/slide16.xml><?xml version="1.0" encoding="utf-8"?>
 <p:sld xmlns:a="http://schemas.openxmlformats.org/drawingml/2006/main" xmlns:r="http://schemas.openxmlformats.org/officeDocument/2006/relationships" xmlns:p="http://schemas.openxmlformats.org/presentationml/2006/main">
   <p:cSld>
     <p:spTree>
@@ -47471,7 +47213,7 @@
         <p:spPr>
           <a:xfrm>
             <a:off x="195889" y="1247815"/>
-            <a:ext cx="8390550" cy="3416320"/>
+            <a:ext cx="8390550" cy="2308324"/>
           </a:xfrm>
           <a:prstGeom prst="rect">
             <a:avLst/>
@@ -47493,17 +47235,11 @@
                   <a:schemeClr val="bg1"/>
                 </a:solidFill>
               </a:rPr>
-              <a:t>Write a python script that contains functions for calculating the area of a circle, the area of a square, the area of a rectangle, and the area of a triangle.</a:t>
+              <a:t>cd into the Lesson 04 folder</a:t>
             </a:r>
           </a:p>
           <a:p>
-            <a:pPr marL="114300" lvl="0" algn="l" rtl="0">
-              <a:spcBef>
-                <a:spcPts val="0"/>
-              </a:spcBef>
-              <a:spcAft>
-                <a:spcPts val="0"/>
-              </a:spcAft>
+            <a:pPr marL="114300" lvl="0">
               <a:buSzPts val="1800"/>
             </a:pPr>
             <a:endParaRPr lang="en-US" sz="2400" dirty="0">
@@ -47513,13 +47249,32 @@
             </a:endParaRPr>
           </a:p>
           <a:p>
+            <a:pPr marL="114300" lvl="0">
+              <a:buSzPts val="1800"/>
+            </a:pPr>
             <a:r>
               <a:rPr lang="en-US" sz="2400" dirty="0">
                 <a:solidFill>
                   <a:schemeClr val="bg1"/>
                 </a:solidFill>
               </a:rPr>
-              <a:t>Import those functions into another python script where you ask the user what shape they would like to calculate the area for, and then prompt the user for necessary information to complete the calculation.  Display the area in a meaningful print statement.</a:t>
+              <a:t>Create a virtual environment there.  Activate the virtual environment and install all of the dependencies listed in requirements.txt.  After you do this, add this folder to your .</a:t>
+            </a:r>
+            <a:r>
+              <a:rPr lang="en-US" sz="2400" dirty="0" err="1">
+                <a:solidFill>
+                  <a:schemeClr val="bg1"/>
+                </a:solidFill>
+              </a:rPr>
+              <a:t>gitignore</a:t>
+            </a:r>
+            <a:r>
+              <a:rPr lang="en-US" sz="2400" dirty="0">
+                <a:solidFill>
+                  <a:schemeClr val="bg1"/>
+                </a:solidFill>
+              </a:rPr>
+              <a:t> within your repo.</a:t>
             </a:r>
           </a:p>
         </p:txBody>
@@ -47642,6 +47397,25 @@
               </a:rPr>
               <a:t>Errors are issues in a program that prevent it from running as expected</a:t>
             </a:r>
+          </a:p>
+          <a:p>
+            <a:pPr marL="457200" marR="0" lvl="0" indent="-342900" algn="l" rtl="0">
+              <a:lnSpc>
+                <a:spcPct val="100000"/>
+              </a:lnSpc>
+              <a:spcBef>
+                <a:spcPts val="0"/>
+              </a:spcBef>
+              <a:spcAft>
+                <a:spcPts val="0"/>
+              </a:spcAft>
+              <a:buClr>
+                <a:schemeClr val="dk2"/>
+              </a:buClr>
+              <a:buSzPts val="1800"/>
+              <a:buFont typeface="Roboto"/>
+              <a:buChar char="●"/>
+            </a:pPr>
             <a:endParaRPr sz="1800" b="0" i="0" u="none" strike="noStrike" cap="none" dirty="0">
               <a:solidFill>
                 <a:schemeClr val="lt1"/>
@@ -47682,6 +47456,25 @@
               </a:rPr>
               <a:t>They help programmers find and fix mistakes</a:t>
             </a:r>
+          </a:p>
+          <a:p>
+            <a:pPr marL="457200" marR="0" lvl="0" indent="-342900" algn="l" rtl="0">
+              <a:lnSpc>
+                <a:spcPct val="100000"/>
+              </a:lnSpc>
+              <a:spcBef>
+                <a:spcPts val="0"/>
+              </a:spcBef>
+              <a:spcAft>
+                <a:spcPts val="0"/>
+              </a:spcAft>
+              <a:buClr>
+                <a:schemeClr val="dk2"/>
+              </a:buClr>
+              <a:buSzPts val="1800"/>
+              <a:buFont typeface="Roboto"/>
+              <a:buChar char="●"/>
+            </a:pPr>
             <a:endParaRPr sz="1800" b="0" i="0" u="none" strike="noStrike" cap="none" dirty="0">
               <a:solidFill>
                 <a:schemeClr val="lt1"/>
@@ -47944,7 +47737,7 @@
                                         <p:tgtEl>
                                           <p:spTgt spid="472">
                                             <p:txEl>
-                                              <p:pRg st="1" end="1"/>
+                                              <p:pRg st="2" end="2"/>
                                             </p:txEl>
                                           </p:spTgt>
                                         </p:tgtEl>
@@ -47993,7 +47786,7 @@
                                         <p:tgtEl>
                                           <p:spTgt spid="472">
                                             <p:txEl>
-                                              <p:pRg st="2" end="2"/>
+                                              <p:pRg st="4" end="4"/>
                                             </p:txEl>
                                           </p:spTgt>
                                         </p:tgtEl>
@@ -48042,7 +47835,7 @@
                                         <p:tgtEl>
                                           <p:spTgt spid="472">
                                             <p:txEl>
-                                              <p:pRg st="3" end="3"/>
+                                              <p:pRg st="5" end="5"/>
                                             </p:txEl>
                                           </p:spTgt>
                                         </p:tgtEl>
@@ -48091,7 +47884,7 @@
                                         <p:tgtEl>
                                           <p:spTgt spid="472">
                                             <p:txEl>
-                                              <p:pRg st="4" end="4"/>
+                                              <p:pRg st="6" end="6"/>
                                             </p:txEl>
                                           </p:spTgt>
                                         </p:tgtEl>
@@ -48140,7 +47933,7 @@
                                         <p:tgtEl>
                                           <p:spTgt spid="472">
                                             <p:txEl>
-                                              <p:pRg st="5" end="5"/>
+                                              <p:pRg st="7" end="7"/>
                                             </p:txEl>
                                           </p:spTgt>
                                         </p:tgtEl>
